--- a/ET_AI_Hackathon_OpsBrain_AI.pptx
+++ b/ET_AI_Hackathon_OpsBrain_AI.pptx
@@ -6220,7 +6220,7 @@
       </p:sp>
       <p:pic>
         <p:nvPicPr>
-          <p:cNvPr id="8" name="Picture 7" descr="04_digital_twin_graph.png"/>
+          <p:cNvPr id="9" name="Picture 8" descr="05_knowledge_copilot.png"/>
           <p:cNvPicPr>
             <a:picLocks noChangeAspect="1"/>
           </p:cNvPicPr>
@@ -6234,7 +6234,7 @@
         </p:blipFill>
         <p:spPr>
           <a:xfrm>
-            <a:off x="6400800" y="1828800"/>
+            <a:off x="6400800" y="4023360"/>
             <a:ext cx="5303520" cy="2011680"/>
           </a:xfrm>
           <a:prstGeom prst="rect">
@@ -6244,7 +6244,13 @@
       </p:pic>
       <p:pic>
         <p:nvPicPr>
-          <p:cNvPr id="9" name="Picture 8" descr="05_knowledge_copilot.png"/>
+          <p:cNvPr id="10" name="Picture 9">
+            <a:extLst>
+              <a:ext uri="{FF2B5EF4-FFF2-40B4-BE49-F238E27FC236}">
+                <a16:creationId xmlns:a16="http://schemas.microsoft.com/office/drawing/2014/main" id="{31256577-E949-AE42-0E04-07A408E22B17}"/>
+              </a:ext>
+            </a:extLst>
+          </p:cNvPr>
           <p:cNvPicPr>
             <a:picLocks noChangeAspect="1"/>
           </p:cNvPicPr>
@@ -6258,7 +6264,7 @@
         </p:blipFill>
         <p:spPr>
           <a:xfrm>
-            <a:off x="6400800" y="4023360"/>
+            <a:off x="6400800" y="1463040"/>
             <a:ext cx="5303520" cy="2011680"/>
           </a:xfrm>
           <a:prstGeom prst="rect">

--- a/ET_AI_Hackathon_OpsBrain_AI.pptx
+++ b/ET_AI_Hackathon_OpsBrain_AI.pptx
@@ -15,6 +15,7 @@
     <p:sldId id="260" r:id="rId6"/>
     <p:sldId id="261" r:id="rId7"/>
     <p:sldId id="262" r:id="rId8"/>
+    <p:sldId id="266" r:id="rId17"/>
     <p:sldId id="263" r:id="rId9"/>
     <p:sldId id="264" r:id="rId10"/>
     <p:sldId id="265" r:id="rId11"/>
@@ -4174,6 +4175,1252 @@
 </p:sld>
 </file>
 
+<file path=ppt/slides/slide11.xml><?xml version="1.0" encoding="utf-8"?>
+<p:sld xmlns:a="http://schemas.openxmlformats.org/drawingml/2006/main" xmlns:p="http://schemas.openxmlformats.org/presentationml/2006/main" xmlns:r="http://schemas.openxmlformats.org/officeDocument/2006/relationships">
+  <p:cSld>
+    <p:spTree>
+      <p:nvGrpSpPr>
+        <p:cNvPr id="1" name=""/>
+        <p:cNvGrpSpPr/>
+        <p:nvPr/>
+      </p:nvGrpSpPr>
+      <p:grpSpPr/>
+      <p:sp>
+        <p:nvSpPr>
+          <p:cNvPr id="2" name="TextBox 1"/>
+          <p:cNvSpPr txBox="1"/>
+          <p:nvPr/>
+        </p:nvSpPr>
+        <p:spPr>
+          <a:xfrm>
+            <a:off x="457200" y="137160"/>
+            <a:ext cx="10972800" cy="320040"/>
+          </a:xfrm>
+          <a:prstGeom prst="rect">
+            <a:avLst/>
+          </a:prstGeom>
+          <a:noFill/>
+        </p:spPr>
+        <p:txBody>
+          <a:bodyPr wrap="square">
+            <a:spAutoFit/>
+          </a:bodyPr>
+          <a:lstStyle/>
+          <a:p>
+            <a:pPr algn="l"/>
+            <a:r>
+              <a:rPr sz="900" b="1" i="0">
+                <a:solidFill>
+                  <a:srgbClr val="00E5FF"/>
+                </a:solidFill>
+              </a:rPr>
+              <a:t>FINALIST-GRADE RESILIENCE UPGRADE</a:t>
+            </a:r>
+          </a:p>
+        </p:txBody>
+      </p:sp>
+      <p:sp>
+        <p:nvSpPr>
+          <p:cNvPr id="3" name="TextBox 2"/>
+          <p:cNvSpPr txBox="1"/>
+          <p:nvPr/>
+        </p:nvSpPr>
+        <p:spPr>
+          <a:xfrm>
+            <a:off x="457200" y="411480"/>
+            <a:ext cx="10972800" cy="548640"/>
+          </a:xfrm>
+          <a:prstGeom prst="rect">
+            <a:avLst/>
+          </a:prstGeom>
+          <a:noFill/>
+        </p:spPr>
+        <p:txBody>
+          <a:bodyPr wrap="square">
+            <a:spAutoFit/>
+          </a:bodyPr>
+          <a:lstStyle/>
+          <a:p>
+            <a:pPr algn="l"/>
+            <a:r>
+              <a:rPr sz="2800" b="1" i="0">
+                <a:solidFill>
+                  <a:srgbClr val="FFFFFF"/>
+                </a:solidFill>
+              </a:rPr>
+              <a:t>AI PROVIDER ROUTER &amp; FAILOVER SYSTEM</a:t>
+            </a:r>
+          </a:p>
+        </p:txBody>
+      </p:sp>
+      <p:sp>
+        <p:nvSpPr>
+          <p:cNvPr id="4" name="TextBox 3"/>
+          <p:cNvSpPr txBox="1"/>
+          <p:nvPr/>
+        </p:nvSpPr>
+        <p:spPr>
+          <a:xfrm>
+            <a:off x="457200" y="960120"/>
+            <a:ext cx="10058400" cy="320040"/>
+          </a:xfrm>
+          <a:prstGeom prst="rect">
+            <a:avLst/>
+          </a:prstGeom>
+          <a:noFill/>
+        </p:spPr>
+        <p:txBody>
+          <a:bodyPr wrap="square">
+            <a:spAutoFit/>
+          </a:bodyPr>
+          <a:lstStyle/>
+          <a:p>
+            <a:pPr algn="l"/>
+            <a:r>
+              <a:rPr sz="1300" b="0" i="1">
+                <a:solidFill>
+                  <a:srgbClr val="B0BECC"/>
+                </a:solidFill>
+              </a:rPr>
+              <a:t>Capability-Aware Multi-Provider Failover with Circuit-Breaker Protection</a:t>
+            </a:r>
+          </a:p>
+        </p:txBody>
+      </p:sp>
+      <p:sp>
+        <p:nvSpPr>
+          <p:cNvPr id="5" name="TextBox 4"/>
+          <p:cNvSpPr txBox="1"/>
+          <p:nvPr/>
+        </p:nvSpPr>
+        <p:spPr>
+          <a:xfrm>
+            <a:off x="457200" y="1298448"/>
+            <a:ext cx="10972800" cy="45720"/>
+          </a:xfrm>
+          <a:prstGeom prst="rect">
+            <a:avLst/>
+          </a:prstGeom>
+          <a:noFill/>
+        </p:spPr>
+        <p:txBody>
+          <a:bodyPr wrap="none">
+            <a:spAutoFit/>
+          </a:bodyPr>
+          <a:lstStyle/>
+          <a:p>
+            <a:r>
+              <a:t/>
+            </a:r>
+          </a:p>
+        </p:txBody>
+      </p:sp>
+      <p:sp>
+        <p:nvSpPr>
+          <p:cNvPr id="6" name="TextBox 5"/>
+          <p:cNvSpPr txBox="1"/>
+          <p:nvPr/>
+        </p:nvSpPr>
+        <p:spPr>
+          <a:xfrm>
+            <a:off x="274320" y="1463040"/>
+            <a:ext cx="2011680" cy="274320"/>
+          </a:xfrm>
+          <a:prstGeom prst="rect">
+            <a:avLst/>
+          </a:prstGeom>
+          <a:noFill/>
+        </p:spPr>
+        <p:txBody>
+          <a:bodyPr wrap="square">
+            <a:spAutoFit/>
+          </a:bodyPr>
+          <a:lstStyle/>
+          <a:p>
+            <a:pPr algn="l"/>
+            <a:r>
+              <a:rPr sz="1100" b="1" i="0">
+                <a:solidFill>
+                  <a:srgbClr val="00E5FF"/>
+                </a:solidFill>
+              </a:rPr>
+              <a:t>TEXT AGENTS</a:t>
+            </a:r>
+          </a:p>
+        </p:txBody>
+      </p:sp>
+      <p:sp>
+        <p:nvSpPr>
+          <p:cNvPr id="7" name="TextBox 6"/>
+          <p:cNvSpPr txBox="1"/>
+          <p:nvPr/>
+        </p:nvSpPr>
+        <p:spPr>
+          <a:xfrm>
+            <a:off x="274320" y="1719072"/>
+            <a:ext cx="2286000" cy="274320"/>
+          </a:xfrm>
+          <a:prstGeom prst="rect">
+            <a:avLst/>
+          </a:prstGeom>
+          <a:noFill/>
+        </p:spPr>
+        <p:txBody>
+          <a:bodyPr wrap="square">
+            <a:spAutoFit/>
+          </a:bodyPr>
+          <a:lstStyle/>
+          <a:p>
+            <a:pPr algn="l"/>
+            <a:r>
+              <a:rPr sz="800" b="0" i="0">
+                <a:solidFill>
+                  <a:srgbClr val="B0BECC"/>
+                </a:solidFill>
+              </a:rPr>
+              <a:t>RCA, Risk, Compliance, Lessons Learned</a:t>
+            </a:r>
+          </a:p>
+        </p:txBody>
+      </p:sp>
+      <p:sp>
+        <p:nvSpPr>
+          <p:cNvPr id="8" name="TextBox 7"/>
+          <p:cNvSpPr txBox="1"/>
+          <p:nvPr/>
+        </p:nvSpPr>
+        <p:spPr>
+          <a:xfrm>
+            <a:off x="2651760" y="1417320"/>
+            <a:ext cx="1920240" cy="502920"/>
+          </a:xfrm>
+          <a:prstGeom prst="rect">
+            <a:avLst/>
+          </a:prstGeom>
+          <a:noFill/>
+        </p:spPr>
+        <p:txBody>
+          <a:bodyPr wrap="none">
+            <a:spAutoFit/>
+          </a:bodyPr>
+          <a:lstStyle/>
+          <a:p>
+            <a:pPr algn="ctr"/>
+            <a:r>
+              <a:rPr sz="900" b="1">
+                <a:solidFill>
+                  <a:srgbClr val="00FF7F"/>
+                </a:solidFill>
+              </a:rPr>
+              <a:t>Groq Llama-3.3</a:t>
+            </a:r>
+          </a:p>
+          <a:p>
+            <a:pPr algn="ctr"/>
+            <a:r>
+              <a:rPr sz="700">
+                <a:solidFill>
+                  <a:srgbClr val="B0BECC"/>
+                </a:solidFill>
+              </a:rPr>
+              <a:t>Primary</a:t>
+            </a:r>
+          </a:p>
+        </p:txBody>
+      </p:sp>
+      <p:sp>
+        <p:nvSpPr>
+          <p:cNvPr id="9" name="TextBox 8"/>
+          <p:cNvSpPr txBox="1"/>
+          <p:nvPr/>
+        </p:nvSpPr>
+        <p:spPr>
+          <a:xfrm>
+            <a:off x="4590288" y="1554480"/>
+            <a:ext cx="274320" cy="228600"/>
+          </a:xfrm>
+          <a:prstGeom prst="rect">
+            <a:avLst/>
+          </a:prstGeom>
+          <a:noFill/>
+        </p:spPr>
+        <p:txBody>
+          <a:bodyPr wrap="none">
+            <a:spAutoFit/>
+          </a:bodyPr>
+          <a:lstStyle/>
+          <a:p>
+            <a:r>
+              <a:rPr sz="1100">
+                <a:solidFill>
+                  <a:srgbClr val="B0BECC"/>
+                </a:solidFill>
+              </a:rPr>
+              <a:t>-&gt;</a:t>
+            </a:r>
+          </a:p>
+        </p:txBody>
+      </p:sp>
+      <p:sp>
+        <p:nvSpPr>
+          <p:cNvPr id="10" name="TextBox 9"/>
+          <p:cNvSpPr txBox="1"/>
+          <p:nvPr/>
+        </p:nvSpPr>
+        <p:spPr>
+          <a:xfrm>
+            <a:off x="4892040" y="1417320"/>
+            <a:ext cx="1920240" cy="502920"/>
+          </a:xfrm>
+          <a:prstGeom prst="rect">
+            <a:avLst/>
+          </a:prstGeom>
+          <a:noFill/>
+        </p:spPr>
+        <p:txBody>
+          <a:bodyPr wrap="none">
+            <a:spAutoFit/>
+          </a:bodyPr>
+          <a:lstStyle/>
+          <a:p>
+            <a:pPr algn="ctr"/>
+            <a:r>
+              <a:rPr sz="900" b="1">
+                <a:solidFill>
+                  <a:srgbClr val="FFD700"/>
+                </a:solidFill>
+              </a:rPr>
+              <a:t>Mistral API</a:t>
+            </a:r>
+          </a:p>
+          <a:p>
+            <a:pPr algn="ctr"/>
+            <a:r>
+              <a:rPr sz="700">
+                <a:solidFill>
+                  <a:srgbClr val="B0BECC"/>
+                </a:solidFill>
+              </a:rPr>
+              <a:t>Fallback 1</a:t>
+            </a:r>
+          </a:p>
+        </p:txBody>
+      </p:sp>
+      <p:sp>
+        <p:nvSpPr>
+          <p:cNvPr id="11" name="TextBox 10"/>
+          <p:cNvSpPr txBox="1"/>
+          <p:nvPr/>
+        </p:nvSpPr>
+        <p:spPr>
+          <a:xfrm>
+            <a:off x="6830568" y="1554480"/>
+            <a:ext cx="274320" cy="228600"/>
+          </a:xfrm>
+          <a:prstGeom prst="rect">
+            <a:avLst/>
+          </a:prstGeom>
+          <a:noFill/>
+        </p:spPr>
+        <p:txBody>
+          <a:bodyPr wrap="none">
+            <a:spAutoFit/>
+          </a:bodyPr>
+          <a:lstStyle/>
+          <a:p>
+            <a:r>
+              <a:rPr sz="1100">
+                <a:solidFill>
+                  <a:srgbClr val="B0BECC"/>
+                </a:solidFill>
+              </a:rPr>
+              <a:t>-&gt;</a:t>
+            </a:r>
+          </a:p>
+        </p:txBody>
+      </p:sp>
+      <p:sp>
+        <p:nvSpPr>
+          <p:cNvPr id="12" name="TextBox 11"/>
+          <p:cNvSpPr txBox="1"/>
+          <p:nvPr/>
+        </p:nvSpPr>
+        <p:spPr>
+          <a:xfrm>
+            <a:off x="7132320" y="1417320"/>
+            <a:ext cx="1920240" cy="502920"/>
+          </a:xfrm>
+          <a:prstGeom prst="rect">
+            <a:avLst/>
+          </a:prstGeom>
+          <a:noFill/>
+        </p:spPr>
+        <p:txBody>
+          <a:bodyPr wrap="none">
+            <a:spAutoFit/>
+          </a:bodyPr>
+          <a:lstStyle/>
+          <a:p>
+            <a:pPr algn="ctr"/>
+            <a:r>
+              <a:rPr sz="900" b="1">
+                <a:solidFill>
+                  <a:srgbClr val="00E5FF"/>
+                </a:solidFill>
+              </a:rPr>
+              <a:t>Gemini Flash</a:t>
+            </a:r>
+          </a:p>
+          <a:p>
+            <a:pPr algn="ctr"/>
+            <a:r>
+              <a:rPr sz="700">
+                <a:solidFill>
+                  <a:srgbClr val="B0BECC"/>
+                </a:solidFill>
+              </a:rPr>
+              <a:t>Fallback 2</a:t>
+            </a:r>
+          </a:p>
+        </p:txBody>
+      </p:sp>
+      <p:sp>
+        <p:nvSpPr>
+          <p:cNvPr id="13" name="TextBox 12"/>
+          <p:cNvSpPr txBox="1"/>
+          <p:nvPr/>
+        </p:nvSpPr>
+        <p:spPr>
+          <a:xfrm>
+            <a:off x="9070848" y="1554480"/>
+            <a:ext cx="274320" cy="228600"/>
+          </a:xfrm>
+          <a:prstGeom prst="rect">
+            <a:avLst/>
+          </a:prstGeom>
+          <a:noFill/>
+        </p:spPr>
+        <p:txBody>
+          <a:bodyPr wrap="none">
+            <a:spAutoFit/>
+          </a:bodyPr>
+          <a:lstStyle/>
+          <a:p>
+            <a:r>
+              <a:rPr sz="1100">
+                <a:solidFill>
+                  <a:srgbClr val="B0BECC"/>
+                </a:solidFill>
+              </a:rPr>
+              <a:t>-&gt;</a:t>
+            </a:r>
+          </a:p>
+        </p:txBody>
+      </p:sp>
+      <p:sp>
+        <p:nvSpPr>
+          <p:cNvPr id="14" name="TextBox 13"/>
+          <p:cNvSpPr txBox="1"/>
+          <p:nvPr/>
+        </p:nvSpPr>
+        <p:spPr>
+          <a:xfrm>
+            <a:off x="9372600" y="1417320"/>
+            <a:ext cx="1920240" cy="502920"/>
+          </a:xfrm>
+          <a:prstGeom prst="rect">
+            <a:avLst/>
+          </a:prstGeom>
+          <a:noFill/>
+        </p:spPr>
+        <p:txBody>
+          <a:bodyPr wrap="none">
+            <a:spAutoFit/>
+          </a:bodyPr>
+          <a:lstStyle/>
+          <a:p>
+            <a:pPr algn="ctr"/>
+            <a:r>
+              <a:rPr sz="900" b="1">
+                <a:solidFill>
+                  <a:srgbClr val="FF6B00"/>
+                </a:solidFill>
+              </a:rPr>
+              <a:t>Seeded Demo</a:t>
+            </a:r>
+          </a:p>
+          <a:p>
+            <a:pPr algn="ctr"/>
+            <a:r>
+              <a:rPr sz="700">
+                <a:solidFill>
+                  <a:srgbClr val="B0BECC"/>
+                </a:solidFill>
+              </a:rPr>
+              <a:t>Fallback 3 - labeled</a:t>
+            </a:r>
+          </a:p>
+        </p:txBody>
+      </p:sp>
+      <p:sp>
+        <p:nvSpPr>
+          <p:cNvPr id="15" name="TextBox 14"/>
+          <p:cNvSpPr txBox="1"/>
+          <p:nvPr/>
+        </p:nvSpPr>
+        <p:spPr>
+          <a:xfrm>
+            <a:off x="274320" y="2423160"/>
+            <a:ext cx="2011680" cy="274320"/>
+          </a:xfrm>
+          <a:prstGeom prst="rect">
+            <a:avLst/>
+          </a:prstGeom>
+          <a:noFill/>
+        </p:spPr>
+        <p:txBody>
+          <a:bodyPr wrap="square">
+            <a:spAutoFit/>
+          </a:bodyPr>
+          <a:lstStyle/>
+          <a:p>
+            <a:pPr algn="l"/>
+            <a:r>
+              <a:rPr sz="1100" b="1" i="0">
+                <a:solidFill>
+                  <a:srgbClr val="00E5FF"/>
+                </a:solidFill>
+              </a:rPr>
+              <a:t>RAG COPILOT</a:t>
+            </a:r>
+          </a:p>
+        </p:txBody>
+      </p:sp>
+      <p:sp>
+        <p:nvSpPr>
+          <p:cNvPr id="16" name="TextBox 15"/>
+          <p:cNvSpPr txBox="1"/>
+          <p:nvPr/>
+        </p:nvSpPr>
+        <p:spPr>
+          <a:xfrm>
+            <a:off x="274320" y="2679192"/>
+            <a:ext cx="2286000" cy="274320"/>
+          </a:xfrm>
+          <a:prstGeom prst="rect">
+            <a:avLst/>
+          </a:prstGeom>
+          <a:noFill/>
+        </p:spPr>
+        <p:txBody>
+          <a:bodyPr wrap="square">
+            <a:spAutoFit/>
+          </a:bodyPr>
+          <a:lstStyle/>
+          <a:p>
+            <a:pPr algn="l"/>
+            <a:r>
+              <a:rPr sz="800" b="0" i="0">
+                <a:solidFill>
+                  <a:srgbClr val="B0BECC"/>
+                </a:solidFill>
+              </a:rPr>
+              <a:t>Knowledge Copilot answers with citations</a:t>
+            </a:r>
+          </a:p>
+        </p:txBody>
+      </p:sp>
+      <p:sp>
+        <p:nvSpPr>
+          <p:cNvPr id="17" name="TextBox 16"/>
+          <p:cNvSpPr txBox="1"/>
+          <p:nvPr/>
+        </p:nvSpPr>
+        <p:spPr>
+          <a:xfrm>
+            <a:off x="2651760" y="2377440"/>
+            <a:ext cx="1920240" cy="502920"/>
+          </a:xfrm>
+          <a:prstGeom prst="rect">
+            <a:avLst/>
+          </a:prstGeom>
+          <a:noFill/>
+        </p:spPr>
+        <p:txBody>
+          <a:bodyPr wrap="none">
+            <a:spAutoFit/>
+          </a:bodyPr>
+          <a:lstStyle/>
+          <a:p>
+            <a:pPr algn="ctr"/>
+            <a:r>
+              <a:rPr sz="900" b="1">
+                <a:solidFill>
+                  <a:srgbClr val="00FF7F"/>
+                </a:solidFill>
+              </a:rPr>
+              <a:t>Groq Llama-3.3</a:t>
+            </a:r>
+          </a:p>
+          <a:p>
+            <a:pPr algn="ctr"/>
+            <a:r>
+              <a:rPr sz="700">
+                <a:solidFill>
+                  <a:srgbClr val="B0BECC"/>
+                </a:solidFill>
+              </a:rPr>
+              <a:t>Primary</a:t>
+            </a:r>
+          </a:p>
+        </p:txBody>
+      </p:sp>
+      <p:sp>
+        <p:nvSpPr>
+          <p:cNvPr id="18" name="TextBox 17"/>
+          <p:cNvSpPr txBox="1"/>
+          <p:nvPr/>
+        </p:nvSpPr>
+        <p:spPr>
+          <a:xfrm>
+            <a:off x="4590288" y="2514600"/>
+            <a:ext cx="274320" cy="228600"/>
+          </a:xfrm>
+          <a:prstGeom prst="rect">
+            <a:avLst/>
+          </a:prstGeom>
+          <a:noFill/>
+        </p:spPr>
+        <p:txBody>
+          <a:bodyPr wrap="none">
+            <a:spAutoFit/>
+          </a:bodyPr>
+          <a:lstStyle/>
+          <a:p>
+            <a:r>
+              <a:rPr sz="1100">
+                <a:solidFill>
+                  <a:srgbClr val="B0BECC"/>
+                </a:solidFill>
+              </a:rPr>
+              <a:t>-&gt;</a:t>
+            </a:r>
+          </a:p>
+        </p:txBody>
+      </p:sp>
+      <p:sp>
+        <p:nvSpPr>
+          <p:cNvPr id="19" name="TextBox 18"/>
+          <p:cNvSpPr txBox="1"/>
+          <p:nvPr/>
+        </p:nvSpPr>
+        <p:spPr>
+          <a:xfrm>
+            <a:off x="4892040" y="2377440"/>
+            <a:ext cx="1920240" cy="502920"/>
+          </a:xfrm>
+          <a:prstGeom prst="rect">
+            <a:avLst/>
+          </a:prstGeom>
+          <a:noFill/>
+        </p:spPr>
+        <p:txBody>
+          <a:bodyPr wrap="none">
+            <a:spAutoFit/>
+          </a:bodyPr>
+          <a:lstStyle/>
+          <a:p>
+            <a:pPr algn="ctr"/>
+            <a:r>
+              <a:rPr sz="900" b="1">
+                <a:solidFill>
+                  <a:srgbClr val="FFD700"/>
+                </a:solidFill>
+              </a:rPr>
+              <a:t>Mistral API</a:t>
+            </a:r>
+          </a:p>
+          <a:p>
+            <a:pPr algn="ctr"/>
+            <a:r>
+              <a:rPr sz="700">
+                <a:solidFill>
+                  <a:srgbClr val="B0BECC"/>
+                </a:solidFill>
+              </a:rPr>
+              <a:t>Fallback 1</a:t>
+            </a:r>
+          </a:p>
+        </p:txBody>
+      </p:sp>
+      <p:sp>
+        <p:nvSpPr>
+          <p:cNvPr id="20" name="TextBox 19"/>
+          <p:cNvSpPr txBox="1"/>
+          <p:nvPr/>
+        </p:nvSpPr>
+        <p:spPr>
+          <a:xfrm>
+            <a:off x="6830568" y="2514600"/>
+            <a:ext cx="274320" cy="228600"/>
+          </a:xfrm>
+          <a:prstGeom prst="rect">
+            <a:avLst/>
+          </a:prstGeom>
+          <a:noFill/>
+        </p:spPr>
+        <p:txBody>
+          <a:bodyPr wrap="none">
+            <a:spAutoFit/>
+          </a:bodyPr>
+          <a:lstStyle/>
+          <a:p>
+            <a:r>
+              <a:rPr sz="1100">
+                <a:solidFill>
+                  <a:srgbClr val="B0BECC"/>
+                </a:solidFill>
+              </a:rPr>
+              <a:t>-&gt;</a:t>
+            </a:r>
+          </a:p>
+        </p:txBody>
+      </p:sp>
+      <p:sp>
+        <p:nvSpPr>
+          <p:cNvPr id="21" name="TextBox 20"/>
+          <p:cNvSpPr txBox="1"/>
+          <p:nvPr/>
+        </p:nvSpPr>
+        <p:spPr>
+          <a:xfrm>
+            <a:off x="7132320" y="2377440"/>
+            <a:ext cx="1920240" cy="502920"/>
+          </a:xfrm>
+          <a:prstGeom prst="rect">
+            <a:avLst/>
+          </a:prstGeom>
+          <a:noFill/>
+        </p:spPr>
+        <p:txBody>
+          <a:bodyPr wrap="none">
+            <a:spAutoFit/>
+          </a:bodyPr>
+          <a:lstStyle/>
+          <a:p>
+            <a:pPr algn="ctr"/>
+            <a:r>
+              <a:rPr sz="900" b="1">
+                <a:solidFill>
+                  <a:srgbClr val="00E5FF"/>
+                </a:solidFill>
+              </a:rPr>
+              <a:t>Gemini Flash</a:t>
+            </a:r>
+          </a:p>
+          <a:p>
+            <a:pPr algn="ctr"/>
+            <a:r>
+              <a:rPr sz="700">
+                <a:solidFill>
+                  <a:srgbClr val="B0BECC"/>
+                </a:solidFill>
+              </a:rPr>
+              <a:t>Fallback 2</a:t>
+            </a:r>
+          </a:p>
+        </p:txBody>
+      </p:sp>
+      <p:sp>
+        <p:nvSpPr>
+          <p:cNvPr id="22" name="TextBox 21"/>
+          <p:cNvSpPr txBox="1"/>
+          <p:nvPr/>
+        </p:nvSpPr>
+        <p:spPr>
+          <a:xfrm>
+            <a:off x="9070848" y="2514600"/>
+            <a:ext cx="274320" cy="228600"/>
+          </a:xfrm>
+          <a:prstGeom prst="rect">
+            <a:avLst/>
+          </a:prstGeom>
+          <a:noFill/>
+        </p:spPr>
+        <p:txBody>
+          <a:bodyPr wrap="none">
+            <a:spAutoFit/>
+          </a:bodyPr>
+          <a:lstStyle/>
+          <a:p>
+            <a:r>
+              <a:rPr sz="1100">
+                <a:solidFill>
+                  <a:srgbClr val="B0BECC"/>
+                </a:solidFill>
+              </a:rPr>
+              <a:t>-&gt;</a:t>
+            </a:r>
+          </a:p>
+        </p:txBody>
+      </p:sp>
+      <p:sp>
+        <p:nvSpPr>
+          <p:cNvPr id="23" name="TextBox 22"/>
+          <p:cNvSpPr txBox="1"/>
+          <p:nvPr/>
+        </p:nvSpPr>
+        <p:spPr>
+          <a:xfrm>
+            <a:off x="9372600" y="2377440"/>
+            <a:ext cx="1920240" cy="502920"/>
+          </a:xfrm>
+          <a:prstGeom prst="rect">
+            <a:avLst/>
+          </a:prstGeom>
+          <a:noFill/>
+        </p:spPr>
+        <p:txBody>
+          <a:bodyPr wrap="none">
+            <a:spAutoFit/>
+          </a:bodyPr>
+          <a:lstStyle/>
+          <a:p>
+            <a:pPr algn="ctr"/>
+            <a:r>
+              <a:rPr sz="900" b="1">
+                <a:solidFill>
+                  <a:srgbClr val="FF6B00"/>
+                </a:solidFill>
+              </a:rPr>
+              <a:t>Seeded Demo</a:t>
+            </a:r>
+          </a:p>
+          <a:p>
+            <a:pPr algn="ctr"/>
+            <a:r>
+              <a:rPr sz="700">
+                <a:solidFill>
+                  <a:srgbClr val="B0BECC"/>
+                </a:solidFill>
+              </a:rPr>
+              <a:t>Fallback 3 - labeled</a:t>
+            </a:r>
+          </a:p>
+        </p:txBody>
+      </p:sp>
+      <p:sp>
+        <p:nvSpPr>
+          <p:cNvPr id="24" name="TextBox 23"/>
+          <p:cNvSpPr txBox="1"/>
+          <p:nvPr/>
+        </p:nvSpPr>
+        <p:spPr>
+          <a:xfrm>
+            <a:off x="274320" y="3383280"/>
+            <a:ext cx="2011680" cy="274320"/>
+          </a:xfrm>
+          <a:prstGeom prst="rect">
+            <a:avLst/>
+          </a:prstGeom>
+          <a:noFill/>
+        </p:spPr>
+        <p:txBody>
+          <a:bodyPr wrap="square">
+            <a:spAutoFit/>
+          </a:bodyPr>
+          <a:lstStyle/>
+          <a:p>
+            <a:pPr algn="l"/>
+            <a:r>
+              <a:rPr sz="1100" b="1" i="0">
+                <a:solidFill>
+                  <a:srgbClr val="00E5FF"/>
+                </a:solidFill>
+              </a:rPr>
+              <a:t>P&amp;ID VISION</a:t>
+            </a:r>
+          </a:p>
+        </p:txBody>
+      </p:sp>
+      <p:sp>
+        <p:nvSpPr>
+          <p:cNvPr id="25" name="TextBox 24"/>
+          <p:cNvSpPr txBox="1"/>
+          <p:nvPr/>
+        </p:nvSpPr>
+        <p:spPr>
+          <a:xfrm>
+            <a:off x="274320" y="3639312"/>
+            <a:ext cx="2286000" cy="274320"/>
+          </a:xfrm>
+          <a:prstGeom prst="rect">
+            <a:avLst/>
+          </a:prstGeom>
+          <a:noFill/>
+        </p:spPr>
+        <p:txBody>
+          <a:bodyPr wrap="square">
+            <a:spAutoFit/>
+          </a:bodyPr>
+          <a:lstStyle/>
+          <a:p>
+            <a:pPr algn="l"/>
+            <a:r>
+              <a:rPr sz="800" b="0" i="0">
+                <a:solidFill>
+                  <a:srgbClr val="B0BECC"/>
+                </a:solidFill>
+              </a:rPr>
+              <a:t>Gemini Vision -&gt; Cached P&amp;ID extraction -&gt; Graceful error</a:t>
+            </a:r>
+          </a:p>
+        </p:txBody>
+      </p:sp>
+      <p:sp>
+        <p:nvSpPr>
+          <p:cNvPr id="26" name="TextBox 25"/>
+          <p:cNvSpPr txBox="1"/>
+          <p:nvPr/>
+        </p:nvSpPr>
+        <p:spPr>
+          <a:xfrm>
+            <a:off x="2651760" y="3337560"/>
+            <a:ext cx="1920240" cy="502920"/>
+          </a:xfrm>
+          <a:prstGeom prst="rect">
+            <a:avLst/>
+          </a:prstGeom>
+          <a:noFill/>
+        </p:spPr>
+        <p:txBody>
+          <a:bodyPr wrap="none">
+            <a:spAutoFit/>
+          </a:bodyPr>
+          <a:lstStyle/>
+          <a:p>
+            <a:pPr algn="ctr"/>
+            <a:r>
+              <a:rPr sz="900" b="1">
+                <a:solidFill>
+                  <a:srgbClr val="00E5FF"/>
+                </a:solidFill>
+              </a:rPr>
+              <a:t>Gemini Flash Vision</a:t>
+            </a:r>
+          </a:p>
+          <a:p>
+            <a:pPr algn="ctr"/>
+            <a:r>
+              <a:rPr sz="700">
+                <a:solidFill>
+                  <a:srgbClr val="B0BECC"/>
+                </a:solidFill>
+              </a:rPr>
+              <a:t>Primary</a:t>
+            </a:r>
+          </a:p>
+        </p:txBody>
+      </p:sp>
+      <p:sp>
+        <p:nvSpPr>
+          <p:cNvPr id="27" name="TextBox 26"/>
+          <p:cNvSpPr txBox="1"/>
+          <p:nvPr/>
+        </p:nvSpPr>
+        <p:spPr>
+          <a:xfrm>
+            <a:off x="4590288" y="3474720"/>
+            <a:ext cx="274320" cy="228600"/>
+          </a:xfrm>
+          <a:prstGeom prst="rect">
+            <a:avLst/>
+          </a:prstGeom>
+          <a:noFill/>
+        </p:spPr>
+        <p:txBody>
+          <a:bodyPr wrap="none">
+            <a:spAutoFit/>
+          </a:bodyPr>
+          <a:lstStyle/>
+          <a:p>
+            <a:r>
+              <a:rPr sz="1100">
+                <a:solidFill>
+                  <a:srgbClr val="B0BECC"/>
+                </a:solidFill>
+              </a:rPr>
+              <a:t>-&gt;</a:t>
+            </a:r>
+          </a:p>
+        </p:txBody>
+      </p:sp>
+      <p:sp>
+        <p:nvSpPr>
+          <p:cNvPr id="28" name="TextBox 27"/>
+          <p:cNvSpPr txBox="1"/>
+          <p:nvPr/>
+        </p:nvSpPr>
+        <p:spPr>
+          <a:xfrm>
+            <a:off x="4892040" y="3337560"/>
+            <a:ext cx="1920240" cy="502920"/>
+          </a:xfrm>
+          <a:prstGeom prst="rect">
+            <a:avLst/>
+          </a:prstGeom>
+          <a:noFill/>
+        </p:spPr>
+        <p:txBody>
+          <a:bodyPr wrap="none">
+            <a:spAutoFit/>
+          </a:bodyPr>
+          <a:lstStyle/>
+          <a:p>
+            <a:pPr algn="ctr"/>
+            <a:r>
+              <a:rPr sz="900" b="1">
+                <a:solidFill>
+                  <a:srgbClr val="FFD700"/>
+                </a:solidFill>
+              </a:rPr>
+              <a:t>Cached P&amp;ID Extract</a:t>
+            </a:r>
+          </a:p>
+          <a:p>
+            <a:pPr algn="ctr"/>
+            <a:r>
+              <a:rPr sz="700">
+                <a:solidFill>
+                  <a:srgbClr val="B0BECC"/>
+                </a:solidFill>
+              </a:rPr>
+              <a:t>Fallback</a:t>
+            </a:r>
+          </a:p>
+        </p:txBody>
+      </p:sp>
+      <p:sp>
+        <p:nvSpPr>
+          <p:cNvPr id="29" name="TextBox 28"/>
+          <p:cNvSpPr txBox="1"/>
+          <p:nvPr/>
+        </p:nvSpPr>
+        <p:spPr>
+          <a:xfrm>
+            <a:off x="6830568" y="3474720"/>
+            <a:ext cx="274320" cy="228600"/>
+          </a:xfrm>
+          <a:prstGeom prst="rect">
+            <a:avLst/>
+          </a:prstGeom>
+          <a:noFill/>
+        </p:spPr>
+        <p:txBody>
+          <a:bodyPr wrap="none">
+            <a:spAutoFit/>
+          </a:bodyPr>
+          <a:lstStyle/>
+          <a:p>
+            <a:r>
+              <a:rPr sz="1100">
+                <a:solidFill>
+                  <a:srgbClr val="B0BECC"/>
+                </a:solidFill>
+              </a:rPr>
+              <a:t>-&gt;</a:t>
+            </a:r>
+          </a:p>
+        </p:txBody>
+      </p:sp>
+      <p:sp>
+        <p:nvSpPr>
+          <p:cNvPr id="30" name="TextBox 29"/>
+          <p:cNvSpPr txBox="1"/>
+          <p:nvPr/>
+        </p:nvSpPr>
+        <p:spPr>
+          <a:xfrm>
+            <a:off x="7132320" y="3337560"/>
+            <a:ext cx="1920240" cy="502920"/>
+          </a:xfrm>
+          <a:prstGeom prst="rect">
+            <a:avLst/>
+          </a:prstGeom>
+          <a:noFill/>
+        </p:spPr>
+        <p:txBody>
+          <a:bodyPr wrap="none">
+            <a:spAutoFit/>
+          </a:bodyPr>
+          <a:lstStyle/>
+          <a:p>
+            <a:pPr algn="ctr"/>
+            <a:r>
+              <a:rPr sz="900" b="1">
+                <a:solidFill>
+                  <a:srgbClr val="FF6B00"/>
+                </a:solidFill>
+              </a:rPr>
+              <a:t>Graceful Error</a:t>
+            </a:r>
+          </a:p>
+          <a:p>
+            <a:pPr algn="ctr"/>
+            <a:r>
+              <a:rPr sz="700">
+                <a:solidFill>
+                  <a:srgbClr val="B0BECC"/>
+                </a:solidFill>
+              </a:rPr>
+              <a:t>Final</a:t>
+            </a:r>
+          </a:p>
+        </p:txBody>
+      </p:sp>
+      <p:sp>
+        <p:nvSpPr>
+          <p:cNvPr id="31" name="TextBox 30"/>
+          <p:cNvSpPr txBox="1"/>
+          <p:nvPr/>
+        </p:nvSpPr>
+        <p:spPr>
+          <a:xfrm>
+            <a:off x="274320" y="4343400"/>
+            <a:ext cx="2011680" cy="274320"/>
+          </a:xfrm>
+          <a:prstGeom prst="rect">
+            <a:avLst/>
+          </a:prstGeom>
+          <a:noFill/>
+        </p:spPr>
+        <p:txBody>
+          <a:bodyPr wrap="square">
+            <a:spAutoFit/>
+          </a:bodyPr>
+          <a:lstStyle/>
+          <a:p>
+            <a:pPr algn="l"/>
+            <a:r>
+              <a:rPr sz="1100" b="1" i="0">
+                <a:solidFill>
+                  <a:srgbClr val="00E5FF"/>
+                </a:solidFill>
+              </a:rPr>
+              <a:t>EMBEDDINGS</a:t>
+            </a:r>
+          </a:p>
+        </p:txBody>
+      </p:sp>
+      <p:sp>
+        <p:nvSpPr>
+          <p:cNvPr id="32" name="TextBox 31"/>
+          <p:cNvSpPr txBox="1"/>
+          <p:nvPr/>
+        </p:nvSpPr>
+        <p:spPr>
+          <a:xfrm>
+            <a:off x="274320" y="4599432"/>
+            <a:ext cx="2286000" cy="274320"/>
+          </a:xfrm>
+          <a:prstGeom prst="rect">
+            <a:avLst/>
+          </a:prstGeom>
+          <a:noFill/>
+        </p:spPr>
+        <p:txBody>
+          <a:bodyPr wrap="square">
+            <a:spAutoFit/>
+          </a:bodyPr>
+          <a:lstStyle/>
+          <a:p>
+            <a:pPr algn="l"/>
+            <a:r>
+              <a:rPr sz="800" b="0" i="0">
+                <a:solidFill>
+                  <a:srgbClr val="B0BECC"/>
+                </a:solidFill>
+              </a:rPr>
+              <a:t>Always local CPU BGE-small-en-v1.5 (no cloud routing)</a:t>
+            </a:r>
+          </a:p>
+        </p:txBody>
+      </p:sp>
+      <p:sp>
+        <p:nvSpPr>
+          <p:cNvPr id="33" name="TextBox 32"/>
+          <p:cNvSpPr txBox="1"/>
+          <p:nvPr/>
+        </p:nvSpPr>
+        <p:spPr>
+          <a:xfrm>
+            <a:off x="2651760" y="4297680"/>
+            <a:ext cx="5486400" cy="502920"/>
+          </a:xfrm>
+          <a:prstGeom prst="rect">
+            <a:avLst/>
+          </a:prstGeom>
+          <a:noFill/>
+        </p:spPr>
+        <p:txBody>
+          <a:bodyPr wrap="none">
+            <a:spAutoFit/>
+          </a:bodyPr>
+          <a:lstStyle/>
+          <a:p>
+            <a:r>
+              <a:rPr sz="1000" b="1">
+                <a:solidFill>
+                  <a:srgbClr val="00FF7F"/>
+                </a:solidFill>
+              </a:rPr>
+              <a:t>Local BAAI/bge-small-en-v1.5 (CPU-only, 384-dim, never routed to cloud)</a:t>
+            </a:r>
+          </a:p>
+        </p:txBody>
+      </p:sp>
+      <p:sp>
+        <p:nvSpPr>
+          <p:cNvPr id="34" name="TextBox 33"/>
+          <p:cNvSpPr txBox="1"/>
+          <p:nvPr/>
+        </p:nvSpPr>
+        <p:spPr>
+          <a:xfrm>
+            <a:off x="274320" y="5532120"/>
+            <a:ext cx="11430000" cy="411480"/>
+          </a:xfrm>
+          <a:prstGeom prst="rect">
+            <a:avLst/>
+          </a:prstGeom>
+          <a:noFill/>
+        </p:spPr>
+        <p:txBody>
+          <a:bodyPr wrap="square">
+            <a:spAutoFit/>
+          </a:bodyPr>
+          <a:lstStyle/>
+          <a:p>
+            <a:pPr algn="l"/>
+            <a:r>
+              <a:rPr sz="900" b="0" i="1">
+                <a:solidFill>
+                  <a:srgbClr val="FF6B00"/>
+                </a:solidFill>
+              </a:rPr>
+              <a:t>Circuit Breaker: 3 consecutive failures -&gt; provider marked DEGRADED for 60s. Fallback label always visible to judges - no silent fake success.</a:t>
+            </a:r>
+          </a:p>
+        </p:txBody>
+      </p:sp>
+    </p:spTree>
+  </p:cSld>
+  <p:clrMapOvr>
+    <a:masterClrMapping/>
+  </p:clrMapOvr>
+</p:sld>
+</file>
+
 <file path=ppt/slides/slide2.xml><?xml version="1.0" encoding="utf-8"?>
 <p:sld xmlns:a="http://schemas.openxmlformats.org/drawingml/2006/main" xmlns:r="http://schemas.openxmlformats.org/officeDocument/2006/relationships" xmlns:p="http://schemas.openxmlformats.org/presentationml/2006/main">
   <p:cSld>
@@ -6456,7 +7703,7 @@
               </a:defRPr>
             </a:pPr>
             <a:r>
-              <a:t>• FastAPI Gateway: Lightweight REST API serving front-end queries and managing background tasks.</a:t>
+              <a:t>• FastAPI Gateway: Lightweight REST API + Capability-Aware AI Provider Router (Groq -&gt; Mistral -&gt; Gemini -&gt; seeded demo fallback) with circuit-breaker protection.</a:t>
             </a:r>
           </a:p>
           <a:p>
